--- a/research/bankroll/docs/seed-bankroll-proposal-2026-09-21.pptx
+++ b/research/bankroll/docs/seed-bankroll-proposal-2026-09-21.pptx
@@ -14,6 +14,7 @@
     <p:sldId id="262" r:id="rId13"/>
     <p:sldId id="263" r:id="rId14"/>
     <p:sldId id="264" r:id="rId15"/>
+    <p:sldId id="265" r:id="rId16"/>
   </p:sldIdLst>
   <p:sldSz cx="12191695" cy="6858000" type="screen4x3"/>
   <p:notesSz cx="6858000" cy="9144000"/>
@@ -3248,6 +3249,301 @@
 </p:sld>
 </file>
 
+<file path=ppt/slides/slide10.xml><?xml version="1.0" encoding="utf-8"?>
+<p:sld xmlns:a="http://schemas.openxmlformats.org/drawingml/2006/main" xmlns:p="http://schemas.openxmlformats.org/presentationml/2006/main" xmlns:r="http://schemas.openxmlformats.org/officeDocument/2006/relationships">
+  <p:cSld>
+    <p:spTree>
+      <p:nvGrpSpPr>
+        <p:cNvPr id="1" name=""/>
+        <p:cNvGrpSpPr/>
+        <p:nvPr/>
+      </p:nvGrpSpPr>
+      <p:grpSpPr/>
+      <p:sp>
+        <p:nvSpPr>
+          <p:cNvPr id="2" name="TextBox 1"/>
+          <p:cNvSpPr txBox="1"/>
+          <p:nvPr/>
+        </p:nvSpPr>
+        <p:spPr>
+          <a:xfrm>
+            <a:off x="548640" y="320040"/>
+            <a:ext cx="10972800" cy="731520"/>
+          </a:xfrm>
+          <a:prstGeom prst="rect">
+            <a:avLst/>
+          </a:prstGeom>
+          <a:noFill/>
+        </p:spPr>
+        <p:txBody>
+          <a:bodyPr wrap="square">
+            <a:spAutoFit/>
+          </a:bodyPr>
+          <a:lstStyle/>
+          <a:p>
+            <a:pPr>
+              <a:spcAft>
+                <a:spcPts val="600"/>
+              </a:spcAft>
+              <a:defRPr sz="2800" b="1">
+                <a:solidFill>
+                  <a:srgbClr val="1A1D24"/>
+                </a:solidFill>
+              </a:defRPr>
+            </a:pPr>
+            <a:r>
+              <a:t>What the money does each week</a:t>
+            </a:r>
+          </a:p>
+        </p:txBody>
+      </p:sp>
+      <p:graphicFrame>
+        <p:nvGraphicFramePr>
+          <p:cNvPr id="3" name="Table 2"/>
+          <p:cNvGraphicFramePr>
+            <a:graphicFrameLocks noGrp="1"/>
+          </p:cNvGraphicFramePr>
+          <p:nvPr/>
+        </p:nvGraphicFramePr>
+        <p:xfrm>
+          <a:off x="548640" y="1463040"/>
+          <a:ext cx="10972800" cy="1463040"/>
+        </p:xfrm>
+        <a:graphic>
+          <a:graphicData uri="http://schemas.openxmlformats.org/drawingml/2006/table">
+            <a:tbl>
+              <a:tblPr firstRow="1" bandRow="1">
+                <a:tableStyleId>{5C22544A-7EE6-4342-B048-85BDC9FD1C3A}</a:tableStyleId>
+              </a:tblPr>
+              <a:tblGrid>
+                <a:gridCol w="2286000"/>
+                <a:gridCol w="8686800"/>
+              </a:tblGrid>
+              <a:tr h="365760">
+                <a:tc>
+                  <a:txBody>
+                    <a:bodyPr/>
+                    <a:lstStyle/>
+                    <a:p>
+                      <a:pPr>
+                        <a:defRPr sz="1500" b="1">
+                          <a:solidFill>
+                            <a:srgbClr val="1A1D24"/>
+                          </a:solidFill>
+                        </a:defRPr>
+                      </a:pPr>
+                      <a:r>
+                        <a:t>day</a:t>
+                      </a:r>
+                    </a:p>
+                  </a:txBody>
+                  <a:tcPr/>
+                </a:tc>
+                <a:tc>
+                  <a:txBody>
+                    <a:bodyPr/>
+                    <a:lstStyle/>
+                    <a:p>
+                      <a:pPr>
+                        <a:defRPr sz="1500" b="1">
+                          <a:solidFill>
+                            <a:srgbClr val="1A1D24"/>
+                          </a:solidFill>
+                        </a:defRPr>
+                      </a:pPr>
+                      <a:r>
+                        <a:t>step</a:t>
+                      </a:r>
+                    </a:p>
+                  </a:txBody>
+                  <a:tcPr/>
+                </a:tc>
+              </a:tr>
+              <a:tr h="365760">
+                <a:tc>
+                  <a:txBody>
+                    <a:bodyPr/>
+                    <a:lstStyle/>
+                    <a:p>
+                      <a:pPr>
+                        <a:defRPr sz="1500" b="0">
+                          <a:solidFill>
+                            <a:srgbClr val="1A1D24"/>
+                          </a:solidFill>
+                        </a:defRPr>
+                      </a:pPr>
+                      <a:r>
+                        <a:t>Wednesday</a:t>
+                      </a:r>
+                    </a:p>
+                  </a:txBody>
+                  <a:tcPr/>
+                </a:tc>
+                <a:tc>
+                  <a:txBody>
+                    <a:bodyPr/>
+                    <a:lstStyle/>
+                    <a:p>
+                      <a:pPr>
+                        <a:defRPr sz="1500" b="0">
+                          <a:solidFill>
+                            <a:srgbClr val="1A1D24"/>
+                          </a:solidFill>
+                        </a:defRPr>
+                      </a:pPr>
+                      <a:r>
+                        <a:t>capture Greenline flags; seed the bet ledger</a:t>
+                      </a:r>
+                    </a:p>
+                  </a:txBody>
+                  <a:tcPr/>
+                </a:tc>
+              </a:tr>
+              <a:tr h="365760">
+                <a:tc>
+                  <a:txBody>
+                    <a:bodyPr/>
+                    <a:lstStyle/>
+                    <a:p>
+                      <a:pPr>
+                        <a:defRPr sz="1500" b="0">
+                          <a:solidFill>
+                            <a:srgbClr val="1A1D24"/>
+                          </a:solidFill>
+                        </a:defRPr>
+                      </a:pPr>
+                      <a:r>
+                        <a:t>Thursday–Saturday</a:t>
+                      </a:r>
+                    </a:p>
+                  </a:txBody>
+                  <a:tcPr/>
+                </a:tc>
+                <a:tc>
+                  <a:txBody>
+                    <a:bodyPr/>
+                    <a:lstStyle/>
+                    <a:p>
+                      <a:pPr>
+                        <a:defRPr sz="1500" b="0">
+                          <a:solidFill>
+                            <a:srgbClr val="1A1D24"/>
+                          </a:solidFill>
+                        </a:defRPr>
+                      </a:pPr>
+                      <a:r>
+                        <a:t>bet 6–12 unders at −110 or better; over-zero board at −120 or better</a:t>
+                      </a:r>
+                    </a:p>
+                  </a:txBody>
+                  <a:tcPr/>
+                </a:tc>
+              </a:tr>
+              <a:tr h="365760">
+                <a:tc>
+                  <a:txBody>
+                    <a:bodyPr/>
+                    <a:lstStyle/>
+                    <a:p>
+                      <a:pPr>
+                        <a:defRPr sz="1500" b="0">
+                          <a:solidFill>
+                            <a:srgbClr val="1A1D24"/>
+                          </a:solidFill>
+                        </a:defRPr>
+                      </a:pPr>
+                      <a:r>
+                        <a:t>Monday</a:t>
+                      </a:r>
+                    </a:p>
+                  </a:txBody>
+                  <a:tcPr/>
+                </a:tc>
+                <a:tc>
+                  <a:txBody>
+                    <a:bodyPr/>
+                    <a:lstStyle/>
+                    <a:p>
+                      <a:pPr>
+                        <a:defRPr sz="1500" b="0">
+                          <a:solidFill>
+                            <a:srgbClr val="1A1D24"/>
+                          </a:solidFill>
+                        </a:defRPr>
+                      </a:pPr>
+                      <a:r>
+                        <a:t>grade flags; mark which were bet; re-derive the unit (min of quarter Kelly and the 3% cap); re-size off the bankroll</a:t>
+                      </a:r>
+                    </a:p>
+                  </a:txBody>
+                  <a:tcPr/>
+                </a:tc>
+              </a:tr>
+            </a:tbl>
+          </a:graphicData>
+        </a:graphic>
+      </p:graphicFrame>
+      <p:sp>
+        <p:nvSpPr>
+          <p:cNvPr id="4" name="TextBox 3"/>
+          <p:cNvSpPr txBox="1"/>
+          <p:nvPr/>
+        </p:nvSpPr>
+        <p:spPr>
+          <a:xfrm>
+            <a:off x="548640" y="3291840"/>
+            <a:ext cx="10972800" cy="2743200"/>
+          </a:xfrm>
+          <a:prstGeom prst="rect">
+            <a:avLst/>
+          </a:prstGeom>
+          <a:noFill/>
+        </p:spPr>
+        <p:txBody>
+          <a:bodyPr wrap="square">
+            <a:spAutoFit/>
+          </a:bodyPr>
+          <a:lstStyle/>
+          <a:p>
+            <a:pPr>
+              <a:spcAft>
+                <a:spcPts val="600"/>
+              </a:spcAft>
+              <a:defRPr sz="1500" b="0">
+                <a:solidFill>
+                  <a:srgbClr val="1A1D24"/>
+                </a:solidFill>
+              </a:defRPr>
+            </a:pPr>
+            <a:r>
+              <a:t>The planning prior is fixed: 2026 flags plus the 2023–25 unders at half weight. The unit moves only by the Monday rule. Golf enters with a graded record, at the same rule.</a:t>
+            </a:r>
+          </a:p>
+          <a:p>
+            <a:pPr>
+              <a:spcAft>
+                <a:spcPts val="600"/>
+              </a:spcAft>
+              <a:defRPr sz="1500" b="0">
+                <a:solidFill>
+                  <a:srgbClr val="1A1D24"/>
+                </a:solidFill>
+              </a:defRPr>
+            </a:pPr>
+            <a:r>
+              <a:t>Marking which flags get bet is the one manual step. It turns '6–12 a week' from a plan into evidence.</a:t>
+            </a:r>
+          </a:p>
+        </p:txBody>
+      </p:sp>
+    </p:spTree>
+  </p:cSld>
+  <p:clrMapOvr>
+    <a:masterClrMapping/>
+  </p:clrMapOvr>
+</p:sld>
+</file>
+
 <file path=ppt/slides/slide2.xml><?xml version="1.0" encoding="utf-8"?>
 <p:sld xmlns:a="http://schemas.openxmlformats.org/drawingml/2006/main" xmlns:p="http://schemas.openxmlformats.org/presentationml/2006/main" xmlns:r="http://schemas.openxmlformats.org/officeDocument/2006/relationships">
   <p:cSld>
@@ -7067,7 +7363,7 @@
               </a:defRPr>
             </a:pPr>
             <a:r>
-              <a:t>Stress-tested under the 3% cap: 1% passes 15 of 25 skeptical scenarios and the combined case on the planning prior; 0.5% passes all 25.</a:t>
+              <a:t>Stress-tested under the 3% cap: 1% passes 17 of 25 skeptical scenarios and the combined case on the planning prior; 0.5% passes all 25.</a:t>
             </a:r>
           </a:p>
         </p:txBody>
@@ -7123,7 +7419,7 @@
               </a:defRPr>
             </a:pPr>
             <a:r>
-              <a:t>What the numbers do not support</a:t>
+              <a:t>The rate, and a week</a:t>
             </a:r>
           </a:p>
         </p:txBody>
@@ -7136,8 +7432,8 @@
         </p:nvSpPr>
         <p:spPr>
           <a:xfrm>
-            <a:off x="548640" y="1371600"/>
-            <a:ext cx="10972800" cy="5029200"/>
+            <a:off x="548640" y="960120"/>
+            <a:ext cx="10972800" cy="457200"/>
           </a:xfrm>
           <a:prstGeom prst="rect">
             <a:avLst/>
@@ -7154,29 +7450,755 @@
               <a:spcAft>
                 <a:spcPts val="600"/>
               </a:spcAft>
-              <a:defRPr sz="1500" b="0">
+              <a:defRPr sz="1400" b="0">
                 <a:solidFill>
-                  <a:srgbClr val="1A1D24"/>
+                  <a:srgbClr val="6B7280"/>
                 </a:solidFill>
               </a:defRPr>
             </a:pPr>
             <a:r>
-              <a:t>• Greenline as independently validated. n=58 in 2026, interval 42.5–67.3%. The planning prior is half personal history of the same signal.</a:t>
-            </a:r>
-          </a:p>
+              <a:t>Medians, computed per simulated path. A season is the unit that compounds; the bankroll is idle 259 days between seasons.</a:t>
+            </a:r>
+          </a:p>
+        </p:txBody>
+      </p:sp>
+      <p:graphicFrame>
+        <p:nvGraphicFramePr>
+          <p:cNvPr id="4" name="Table 3"/>
+          <p:cNvGraphicFramePr>
+            <a:graphicFrameLocks noGrp="1"/>
+          </p:cNvGraphicFramePr>
+          <p:nvPr/>
+        </p:nvGraphicFramePr>
+        <p:xfrm>
+          <a:off x="548640" y="1554480"/>
+          <a:ext cx="5577840" cy="1828800"/>
+        </p:xfrm>
+        <a:graphic>
+          <a:graphicData uri="http://schemas.openxmlformats.org/drawingml/2006/table">
+            <a:tbl>
+              <a:tblPr firstRow="1" bandRow="1">
+                <a:tableStyleId>{5C22544A-7EE6-4342-B048-85BDC9FD1C3A}</a:tableStyleId>
+              </a:tblPr>
+              <a:tblGrid>
+                <a:gridCol w="2834640"/>
+                <a:gridCol w="1371600"/>
+                <a:gridCol w="1371600"/>
+              </a:tblGrid>
+              <a:tr h="365760">
+                <a:tc>
+                  <a:txBody>
+                    <a:bodyPr/>
+                    <a:lstStyle/>
+                    <a:p>
+                      <a:pPr>
+                        <a:defRPr sz="1300" b="1">
+                          <a:solidFill>
+                            <a:srgbClr val="1A1D24"/>
+                          </a:solidFill>
+                        </a:defRPr>
+                      </a:pPr>
+                      <a:r>
+                        <a:t>growth</a:t>
+                      </a:r>
+                    </a:p>
+                  </a:txBody>
+                  <a:tcPr/>
+                </a:tc>
+                <a:tc>
+                  <a:txBody>
+                    <a:bodyPr/>
+                    <a:lstStyle/>
+                    <a:p>
+                      <a:pPr>
+                        <a:defRPr sz="1300" b="1">
+                          <a:solidFill>
+                            <a:srgbClr val="1A1D24"/>
+                          </a:solidFill>
+                        </a:defRPr>
+                      </a:pPr>
+                      <a:r>
+                        <a:t>1% unit</a:t>
+                      </a:r>
+                    </a:p>
+                  </a:txBody>
+                  <a:tcPr/>
+                </a:tc>
+                <a:tc>
+                  <a:txBody>
+                    <a:bodyPr/>
+                    <a:lstStyle/>
+                    <a:p>
+                      <a:pPr>
+                        <a:defRPr sz="1300" b="1">
+                          <a:solidFill>
+                            <a:srgbClr val="1A1D24"/>
+                          </a:solidFill>
+                        </a:defRPr>
+                      </a:pPr>
+                      <a:r>
+                        <a:t>0.5% unit</a:t>
+                      </a:r>
+                    </a:p>
+                  </a:txBody>
+                  <a:tcPr/>
+                </a:tc>
+              </a:tr>
+              <a:tr h="365760">
+                <a:tc>
+                  <a:txBody>
+                    <a:bodyPr/>
+                    <a:lstStyle/>
+                    <a:p>
+                      <a:pPr>
+                        <a:defRPr sz="1300" b="0">
+                          <a:solidFill>
+                            <a:srgbClr val="1A1D24"/>
+                          </a:solidFill>
+                        </a:defRPr>
+                      </a:pPr>
+                      <a:r>
+                        <a:t>rest of 2026, 12 weeks</a:t>
+                      </a:r>
+                    </a:p>
+                  </a:txBody>
+                  <a:tcPr/>
+                </a:tc>
+                <a:tc>
+                  <a:txBody>
+                    <a:bodyPr/>
+                    <a:lstStyle/>
+                    <a:p>
+                      <a:pPr>
+                        <a:defRPr sz="1300" b="0">
+                          <a:solidFill>
+                            <a:srgbClr val="1A1D24"/>
+                          </a:solidFill>
+                        </a:defRPr>
+                      </a:pPr>
+                      <a:r>
+                        <a:t>+8.2%</a:t>
+                      </a:r>
+                    </a:p>
+                  </a:txBody>
+                  <a:tcPr/>
+                </a:tc>
+                <a:tc>
+                  <a:txBody>
+                    <a:bodyPr/>
+                    <a:lstStyle/>
+                    <a:p>
+                      <a:pPr>
+                        <a:defRPr sz="1300" b="0">
+                          <a:solidFill>
+                            <a:srgbClr val="1A1D24"/>
+                          </a:solidFill>
+                        </a:defRPr>
+                      </a:pPr>
+                      <a:r>
+                        <a:t>+4.5%</a:t>
+                      </a:r>
+                    </a:p>
+                  </a:txBody>
+                  <a:tcPr/>
+                </a:tc>
+              </a:tr>
+              <a:tr h="365760">
+                <a:tc>
+                  <a:txBody>
+                    <a:bodyPr/>
+                    <a:lstStyle/>
+                    <a:p>
+                      <a:pPr>
+                        <a:defRPr sz="1300" b="0">
+                          <a:solidFill>
+                            <a:srgbClr val="1A1D24"/>
+                          </a:solidFill>
+                        </a:defRPr>
+                      </a:pPr>
+                      <a:r>
+                        <a:t>a full 2027 season</a:t>
+                      </a:r>
+                    </a:p>
+                  </a:txBody>
+                  <a:tcPr/>
+                </a:tc>
+                <a:tc>
+                  <a:txBody>
+                    <a:bodyPr/>
+                    <a:lstStyle/>
+                    <a:p>
+                      <a:pPr>
+                        <a:defRPr sz="1300" b="0">
+                          <a:solidFill>
+                            <a:srgbClr val="1A1D24"/>
+                          </a:solidFill>
+                        </a:defRPr>
+                      </a:pPr>
+                      <a:r>
+                        <a:t>+11.9%</a:t>
+                      </a:r>
+                    </a:p>
+                  </a:txBody>
+                  <a:tcPr/>
+                </a:tc>
+                <a:tc>
+                  <a:txBody>
+                    <a:bodyPr/>
+                    <a:lstStyle/>
+                    <a:p>
+                      <a:pPr>
+                        <a:defRPr sz="1300" b="0">
+                          <a:solidFill>
+                            <a:srgbClr val="1A1D24"/>
+                          </a:solidFill>
+                        </a:defRPr>
+                      </a:pPr>
+                      <a:r>
+                        <a:t>+7.3%</a:t>
+                      </a:r>
+                    </a:p>
+                  </a:txBody>
+                  <a:tcPr/>
+                </a:tc>
+              </a:tr>
+              <a:tr h="365760">
+                <a:tc>
+                  <a:txBody>
+                    <a:bodyPr/>
+                    <a:lstStyle/>
+                    <a:p>
+                      <a:pPr>
+                        <a:defRPr sz="1300" b="0">
+                          <a:solidFill>
+                            <a:srgbClr val="1A1D24"/>
+                          </a:solidFill>
+                        </a:defRPr>
+                      </a:pPr>
+                      <a:r>
+                        <a:t>CAGR, 1.21 yrs to Dec 2027</a:t>
+                      </a:r>
+                    </a:p>
+                  </a:txBody>
+                  <a:tcPr/>
+                </a:tc>
+                <a:tc>
+                  <a:txBody>
+                    <a:bodyPr/>
+                    <a:lstStyle/>
+                    <a:p>
+                      <a:pPr>
+                        <a:defRPr sz="1300" b="0">
+                          <a:solidFill>
+                            <a:srgbClr val="1A1D24"/>
+                          </a:solidFill>
+                        </a:defRPr>
+                      </a:pPr>
+                      <a:r>
+                        <a:t>+16.8%</a:t>
+                      </a:r>
+                    </a:p>
+                  </a:txBody>
+                  <a:tcPr/>
+                </a:tc>
+                <a:tc>
+                  <a:txBody>
+                    <a:bodyPr/>
+                    <a:lstStyle/>
+                    <a:p>
+                      <a:pPr>
+                        <a:defRPr sz="1300" b="0">
+                          <a:solidFill>
+                            <a:srgbClr val="1A1D24"/>
+                          </a:solidFill>
+                        </a:defRPr>
+                      </a:pPr>
+                      <a:r>
+                        <a:t>+9.8%</a:t>
+                      </a:r>
+                    </a:p>
+                  </a:txBody>
+                  <a:tcPr/>
+                </a:tc>
+              </a:tr>
+              <a:tr h="365760">
+                <a:tc>
+                  <a:txBody>
+                    <a:bodyPr/>
+                    <a:lstStyle/>
+                    <a:p>
+                      <a:pPr>
+                        <a:defRPr sz="1300" b="0">
+                          <a:solidFill>
+                            <a:srgbClr val="1A1D24"/>
+                          </a:solidFill>
+                        </a:defRPr>
+                      </a:pPr>
+                      <a:r>
+                        <a:t>ending bankroll, Dec 2027</a:t>
+                      </a:r>
+                    </a:p>
+                  </a:txBody>
+                  <a:tcPr/>
+                </a:tc>
+                <a:tc>
+                  <a:txBody>
+                    <a:bodyPr/>
+                    <a:lstStyle/>
+                    <a:p>
+                      <a:pPr>
+                        <a:defRPr sz="1300" b="0">
+                          <a:solidFill>
+                            <a:srgbClr val="1A1D24"/>
+                          </a:solidFill>
+                        </a:defRPr>
+                      </a:pPr>
+                      <a:r>
+                        <a:t>$24,155</a:t>
+                      </a:r>
+                    </a:p>
+                  </a:txBody>
+                  <a:tcPr/>
+                </a:tc>
+                <a:tc>
+                  <a:txBody>
+                    <a:bodyPr/>
+                    <a:lstStyle/>
+                    <a:p>
+                      <a:pPr>
+                        <a:defRPr sz="1300" b="0">
+                          <a:solidFill>
+                            <a:srgbClr val="1A1D24"/>
+                          </a:solidFill>
+                        </a:defRPr>
+                      </a:pPr>
+                      <a:r>
+                        <a:t>$22,410</a:t>
+                      </a:r>
+                    </a:p>
+                  </a:txBody>
+                  <a:tcPr/>
+                </a:tc>
+              </a:tr>
+            </a:tbl>
+          </a:graphicData>
+        </a:graphic>
+      </p:graphicFrame>
+      <p:graphicFrame>
+        <p:nvGraphicFramePr>
+          <p:cNvPr id="5" name="Table 4"/>
+          <p:cNvGraphicFramePr>
+            <a:graphicFrameLocks noGrp="1"/>
+          </p:cNvGraphicFramePr>
+          <p:nvPr/>
+        </p:nvGraphicFramePr>
+        <p:xfrm>
+          <a:off x="6400800" y="1554480"/>
+          <a:ext cx="5486400" cy="2194560"/>
+        </p:xfrm>
+        <a:graphic>
+          <a:graphicData uri="http://schemas.openxmlformats.org/drawingml/2006/table">
+            <a:tbl>
+              <a:tblPr firstRow="1" bandRow="1">
+                <a:tableStyleId>{5C22544A-7EE6-4342-B048-85BDC9FD1C3A}</a:tableStyleId>
+              </a:tblPr>
+              <a:tblGrid>
+                <a:gridCol w="2194560"/>
+                <a:gridCol w="1645920"/>
+                <a:gridCol w="1645920"/>
+              </a:tblGrid>
+              <a:tr h="365760">
+                <a:tc>
+                  <a:txBody>
+                    <a:bodyPr/>
+                    <a:lstStyle/>
+                    <a:p>
+                      <a:pPr>
+                        <a:defRPr sz="1300" b="1">
+                          <a:solidFill>
+                            <a:srgbClr val="1A1D24"/>
+                          </a:solidFill>
+                        </a:defRPr>
+                      </a:pPr>
+                      <a:r>
+                        <a:t>a week</a:t>
+                      </a:r>
+                    </a:p>
+                  </a:txBody>
+                  <a:tcPr/>
+                </a:tc>
+                <a:tc>
+                  <a:txBody>
+                    <a:bodyPr/>
+                    <a:lstStyle/>
+                    <a:p>
+                      <a:pPr>
+                        <a:defRPr sz="1300" b="1">
+                          <a:solidFill>
+                            <a:srgbClr val="1A1D24"/>
+                          </a:solidFill>
+                        </a:defRPr>
+                      </a:pPr>
+                      <a:r>
+                        <a:t>1% unit</a:t>
+                      </a:r>
+                    </a:p>
+                  </a:txBody>
+                  <a:tcPr/>
+                </a:tc>
+                <a:tc>
+                  <a:txBody>
+                    <a:bodyPr/>
+                    <a:lstStyle/>
+                    <a:p>
+                      <a:pPr>
+                        <a:defRPr sz="1300" b="1">
+                          <a:solidFill>
+                            <a:srgbClr val="1A1D24"/>
+                          </a:solidFill>
+                        </a:defRPr>
+                      </a:pPr>
+                      <a:r>
+                        <a:t>0.5% unit</a:t>
+                      </a:r>
+                    </a:p>
+                  </a:txBody>
+                  <a:tcPr/>
+                </a:tc>
+              </a:tr>
+              <a:tr h="365760">
+                <a:tc>
+                  <a:txBody>
+                    <a:bodyPr/>
+                    <a:lstStyle/>
+                    <a:p>
+                      <a:pPr>
+                        <a:defRPr sz="1300" b="0">
+                          <a:solidFill>
+                            <a:srgbClr val="1A1D24"/>
+                          </a:solidFill>
+                        </a:defRPr>
+                      </a:pPr>
+                      <a:r>
+                        <a:t>median week</a:t>
+                      </a:r>
+                    </a:p>
+                  </a:txBody>
+                  <a:tcPr/>
+                </a:tc>
+                <a:tc>
+                  <a:txBody>
+                    <a:bodyPr/>
+                    <a:lstStyle/>
+                    <a:p>
+                      <a:pPr>
+                        <a:defRPr sz="1300" b="0">
+                          <a:solidFill>
+                            <a:srgbClr val="1A1D24"/>
+                          </a:solidFill>
+                        </a:defRPr>
+                      </a:pPr>
+                      <a:r>
+                        <a:t>$125</a:t>
+                      </a:r>
+                    </a:p>
+                  </a:txBody>
+                  <a:tcPr/>
+                </a:tc>
+                <a:tc>
+                  <a:txBody>
+                    <a:bodyPr/>
+                    <a:lstStyle/>
+                    <a:p>
+                      <a:pPr>
+                        <a:defRPr sz="1300" b="0">
+                          <a:solidFill>
+                            <a:srgbClr val="1A1D24"/>
+                          </a:solidFill>
+                        </a:defRPr>
+                      </a:pPr>
+                      <a:r>
+                        <a:t>$67</a:t>
+                      </a:r>
+                    </a:p>
+                  </a:txBody>
+                  <a:tcPr/>
+                </a:tc>
+              </a:tr>
+              <a:tr h="365760">
+                <a:tc>
+                  <a:txBody>
+                    <a:bodyPr/>
+                    <a:lstStyle/>
+                    <a:p>
+                      <a:pPr>
+                        <a:defRPr sz="1300" b="0">
+                          <a:solidFill>
+                            <a:srgbClr val="1A1D24"/>
+                          </a:solidFill>
+                        </a:defRPr>
+                      </a:pPr>
+                      <a:r>
+                        <a:t>middle half of weeks</a:t>
+                      </a:r>
+                    </a:p>
+                  </a:txBody>
+                  <a:tcPr/>
+                </a:tc>
+                <a:tc>
+                  <a:txBody>
+                    <a:bodyPr/>
+                    <a:lstStyle/>
+                    <a:p>
+                      <a:pPr>
+                        <a:defRPr sz="1300" b="0">
+                          <a:solidFill>
+                            <a:srgbClr val="1A1D24"/>
+                          </a:solidFill>
+                        </a:defRPr>
+                      </a:pPr>
+                      <a:r>
+                        <a:t>−$328 to $669</a:t>
+                      </a:r>
+                    </a:p>
+                  </a:txBody>
+                  <a:tcPr/>
+                </a:tc>
+                <a:tc>
+                  <a:txBody>
+                    <a:bodyPr/>
+                    <a:lstStyle/>
+                    <a:p>
+                      <a:pPr>
+                        <a:defRPr sz="1300" b="0">
+                          <a:solidFill>
+                            <a:srgbClr val="1A1D24"/>
+                          </a:solidFill>
+                        </a:defRPr>
+                      </a:pPr>
+                      <a:r>
+                        <a:t>−$171 to $341</a:t>
+                      </a:r>
+                    </a:p>
+                  </a:txBody>
+                  <a:tcPr/>
+                </a:tc>
+              </a:tr>
+              <a:tr h="365760">
+                <a:tc>
+                  <a:txBody>
+                    <a:bodyPr/>
+                    <a:lstStyle/>
+                    <a:p>
+                      <a:pPr>
+                        <a:defRPr sz="1300" b="0">
+                          <a:solidFill>
+                            <a:srgbClr val="1A1D24"/>
+                          </a:solidFill>
+                        </a:defRPr>
+                      </a:pPr>
+                      <a:r>
+                        <a:t>5th–95th pct week</a:t>
+                      </a:r>
+                    </a:p>
+                  </a:txBody>
+                  <a:tcPr/>
+                </a:tc>
+                <a:tc>
+                  <a:txBody>
+                    <a:bodyPr/>
+                    <a:lstStyle/>
+                    <a:p>
+                      <a:pPr>
+                        <a:defRPr sz="1300" b="0">
+                          <a:solidFill>
+                            <a:srgbClr val="1A1D24"/>
+                          </a:solidFill>
+                        </a:defRPr>
+                      </a:pPr>
+                      <a:r>
+                        <a:t>−$1,080 to $1,360</a:t>
+                      </a:r>
+                    </a:p>
+                  </a:txBody>
+                  <a:tcPr/>
+                </a:tc>
+                <a:tc>
+                  <a:txBody>
+                    <a:bodyPr/>
+                    <a:lstStyle/>
+                    <a:p>
+                      <a:pPr>
+                        <a:defRPr sz="1300" b="0">
+                          <a:solidFill>
+                            <a:srgbClr val="1A1D24"/>
+                          </a:solidFill>
+                        </a:defRPr>
+                      </a:pPr>
+                      <a:r>
+                        <a:t>−$556 to $703</a:t>
+                      </a:r>
+                    </a:p>
+                  </a:txBody>
+                  <a:tcPr/>
+                </a:tc>
+              </a:tr>
+              <a:tr h="365760">
+                <a:tc>
+                  <a:txBody>
+                    <a:bodyPr/>
+                    <a:lstStyle/>
+                    <a:p>
+                      <a:pPr>
+                        <a:defRPr sz="1300" b="0">
+                          <a:solidFill>
+                            <a:srgbClr val="1A1D24"/>
+                          </a:solidFill>
+                        </a:defRPr>
+                      </a:pPr>
+                      <a:r>
+                        <a:t>worst week, median</a:t>
+                      </a:r>
+                    </a:p>
+                  </a:txBody>
+                  <a:tcPr/>
+                </a:tc>
+                <a:tc>
+                  <a:txBody>
+                    <a:bodyPr/>
+                    <a:lstStyle/>
+                    <a:p>
+                      <a:pPr>
+                        <a:defRPr sz="1300" b="0">
+                          <a:solidFill>
+                            <a:srgbClr val="1A1D24"/>
+                          </a:solidFill>
+                        </a:defRPr>
+                      </a:pPr>
+                      <a:r>
+                        <a:t>−$1,055</a:t>
+                      </a:r>
+                    </a:p>
+                  </a:txBody>
+                  <a:tcPr/>
+                </a:tc>
+                <a:tc>
+                  <a:txBody>
+                    <a:bodyPr/>
+                    <a:lstStyle/>
+                    <a:p>
+                      <a:pPr>
+                        <a:defRPr sz="1300" b="0">
+                          <a:solidFill>
+                            <a:srgbClr val="1A1D24"/>
+                          </a:solidFill>
+                        </a:defRPr>
+                      </a:pPr>
+                      <a:r>
+                        <a:t>−$536</a:t>
+                      </a:r>
+                    </a:p>
+                  </a:txBody>
+                  <a:tcPr/>
+                </a:tc>
+              </a:tr>
+              <a:tr h="365760">
+                <a:tc>
+                  <a:txBody>
+                    <a:bodyPr/>
+                    <a:lstStyle/>
+                    <a:p>
+                      <a:pPr>
+                        <a:defRPr sz="1300" b="0">
+                          <a:solidFill>
+                            <a:srgbClr val="1A1D24"/>
+                          </a:solidFill>
+                        </a:defRPr>
+                      </a:pPr>
+                      <a:r>
+                        <a:t>weeks ending in profit</a:t>
+                      </a:r>
+                    </a:p>
+                  </a:txBody>
+                  <a:tcPr/>
+                </a:tc>
+                <a:tc>
+                  <a:txBody>
+                    <a:bodyPr/>
+                    <a:lstStyle/>
+                    <a:p>
+                      <a:pPr>
+                        <a:defRPr sz="1300" b="0">
+                          <a:solidFill>
+                            <a:srgbClr val="1A1D24"/>
+                          </a:solidFill>
+                        </a:defRPr>
+                      </a:pPr>
+                      <a:r>
+                        <a:t>58.1%</a:t>
+                      </a:r>
+                    </a:p>
+                  </a:txBody>
+                  <a:tcPr/>
+                </a:tc>
+                <a:tc>
+                  <a:txBody>
+                    <a:bodyPr/>
+                    <a:lstStyle/>
+                    <a:p>
+                      <a:pPr>
+                        <a:defRPr sz="1300" b="0">
+                          <a:solidFill>
+                            <a:srgbClr val="1A1D24"/>
+                          </a:solidFill>
+                        </a:defRPr>
+                      </a:pPr>
+                      <a:r>
+                        <a:t>58.2%</a:t>
+                      </a:r>
+                    </a:p>
+                  </a:txBody>
+                  <a:tcPr/>
+                </a:tc>
+              </a:tr>
+            </a:tbl>
+          </a:graphicData>
+        </a:graphic>
+      </p:graphicFrame>
+      <p:sp>
+        <p:nvSpPr>
+          <p:cNvPr id="6" name="TextBox 5"/>
+          <p:cNvSpPr txBox="1"/>
+          <p:nvPr/>
+        </p:nvSpPr>
+        <p:spPr>
+          <a:xfrm>
+            <a:off x="548640" y="4206240"/>
+            <a:ext cx="11155680" cy="2194560"/>
+          </a:xfrm>
+          <a:prstGeom prst="rect">
+            <a:avLst/>
+          </a:prstGeom>
+          <a:noFill/>
+        </p:spPr>
+        <p:txBody>
+          <a:bodyPr wrap="square">
+            <a:spAutoFit/>
+          </a:bodyPr>
+          <a:lstStyle/>
           <a:p>
             <a:pPr>
               <a:spcAft>
                 <a:spcPts val="600"/>
               </a:spcAft>
-              <a:defRPr sz="1500" b="0">
+              <a:defRPr sz="1400" b="0">
                 <a:solidFill>
-                  <a:srgbClr val="1A1D24"/>
+                  <a:srgbClr val="6B7280"/>
                 </a:solidFill>
               </a:defRPr>
             </a:pPr>
             <a:r>
-              <a:t>• The 2027 numbers as a forecast. They assume the edge persists unchanged on 2025's schedule.</a:t>
+              <a:t>No annualised figure for 2026 alone: 79 days of betting then 259 idle would turn +8% into something near +43%. The CAGR row spans the whole funded window with the idle months counted in.</a:t>
             </a:r>
           </a:p>
           <a:p>
@@ -7184,14 +8206,14 @@
               <a:spcAft>
                 <a:spcPts val="600"/>
               </a:spcAft>
-              <a:defRPr sz="1500" b="0">
+              <a:defRPr sz="1400" b="0">
                 <a:solidFill>
-                  <a:srgbClr val="1A1D24"/>
+                  <a:srgbClr val="6B7280"/>
                 </a:solidFill>
               </a:defRPr>
             </a:pPr>
             <a:r>
-              <a:t>• Golf. No record, no price, no volume. A placeholder leg until graded.</a:t>
+              <a:t>A typical week makes $125 and the worst week of a typical season loses $1,055. Four weeks in ten lose money at both units — stake size moves the size of the swing, never its frequency.</a:t>
             </a:r>
           </a:p>
           <a:p>
@@ -7199,44 +8221,14 @@
               <a:spcAft>
                 <a:spcPts val="600"/>
               </a:spcAft>
-              <a:defRPr sz="1500" b="0">
+              <a:defRPr sz="1400" b="0">
                 <a:solidFill>
-                  <a:srgbClr val="1A1D24"/>
+                  <a:srgbClr val="6B7280"/>
                 </a:solidFill>
               </a:defRPr>
             </a:pPr>
             <a:r>
-              <a:t>• A reproducible selection rule. 'Bet 6–12 of the week's flags' is a volume plan; no script picks which ones.</a:t>
-            </a:r>
-          </a:p>
-          <a:p>
-            <a:pPr>
-              <a:spcAft>
-                <a:spcPts val="600"/>
-              </a:spcAft>
-              <a:defRPr sz="1500" b="0">
-                <a:solidFill>
-                  <a:srgbClr val="1A1D24"/>
-                </a:solidFill>
-              </a:defRPr>
-            </a:pPr>
-            <a:r>
-              <a:t>• Kelly as today's rule. Quarter Kelly is 1.3%; the 3% drawdown cap binds at 1%. That is where the unit is headed if the record holds.</a:t>
-            </a:r>
-          </a:p>
-          <a:p>
-            <a:pPr>
-              <a:spcAft>
-                <a:spcPts val="600"/>
-              </a:spcAft>
-              <a:defRPr sz="1500" b="0">
-                <a:solidFill>
-                  <a:srgbClr val="1A1D24"/>
-                </a:solidFill>
-              </a:defRPr>
-            </a:pPr>
-            <a:r>
-              <a:t>• The negative cross-leg correlation as a hedge. A common model-or-market failure that hurts both legs is not modeled.</a:t>
+              <a:t>Dollar rows are the 2026 leg only; stakes re-size weekly, so a 2027 week is not the same week.</a:t>
             </a:r>
           </a:p>
         </p:txBody>
@@ -7292,207 +8284,21 @@
               </a:defRPr>
             </a:pPr>
             <a:r>
-              <a:t>What the money does each week</a:t>
+              <a:t>What the numbers do not support</a:t>
             </a:r>
           </a:p>
         </p:txBody>
       </p:sp>
-      <p:graphicFrame>
-        <p:nvGraphicFramePr>
-          <p:cNvPr id="3" name="Table 2"/>
-          <p:cNvGraphicFramePr>
-            <a:graphicFrameLocks noGrp="1"/>
-          </p:cNvGraphicFramePr>
-          <p:nvPr/>
-        </p:nvGraphicFramePr>
-        <p:xfrm>
-          <a:off x="548640" y="1463040"/>
-          <a:ext cx="10972800" cy="1463040"/>
-        </p:xfrm>
-        <a:graphic>
-          <a:graphicData uri="http://schemas.openxmlformats.org/drawingml/2006/table">
-            <a:tbl>
-              <a:tblPr firstRow="1" bandRow="1">
-                <a:tableStyleId>{5C22544A-7EE6-4342-B048-85BDC9FD1C3A}</a:tableStyleId>
-              </a:tblPr>
-              <a:tblGrid>
-                <a:gridCol w="2286000"/>
-                <a:gridCol w="8686800"/>
-              </a:tblGrid>
-              <a:tr h="365760">
-                <a:tc>
-                  <a:txBody>
-                    <a:bodyPr/>
-                    <a:lstStyle/>
-                    <a:p>
-                      <a:pPr>
-                        <a:defRPr sz="1500" b="1">
-                          <a:solidFill>
-                            <a:srgbClr val="1A1D24"/>
-                          </a:solidFill>
-                        </a:defRPr>
-                      </a:pPr>
-                      <a:r>
-                        <a:t>day</a:t>
-                      </a:r>
-                    </a:p>
-                  </a:txBody>
-                  <a:tcPr/>
-                </a:tc>
-                <a:tc>
-                  <a:txBody>
-                    <a:bodyPr/>
-                    <a:lstStyle/>
-                    <a:p>
-                      <a:pPr>
-                        <a:defRPr sz="1500" b="1">
-                          <a:solidFill>
-                            <a:srgbClr val="1A1D24"/>
-                          </a:solidFill>
-                        </a:defRPr>
-                      </a:pPr>
-                      <a:r>
-                        <a:t>step</a:t>
-                      </a:r>
-                    </a:p>
-                  </a:txBody>
-                  <a:tcPr/>
-                </a:tc>
-              </a:tr>
-              <a:tr h="365760">
-                <a:tc>
-                  <a:txBody>
-                    <a:bodyPr/>
-                    <a:lstStyle/>
-                    <a:p>
-                      <a:pPr>
-                        <a:defRPr sz="1500" b="0">
-                          <a:solidFill>
-                            <a:srgbClr val="1A1D24"/>
-                          </a:solidFill>
-                        </a:defRPr>
-                      </a:pPr>
-                      <a:r>
-                        <a:t>Wednesday</a:t>
-                      </a:r>
-                    </a:p>
-                  </a:txBody>
-                  <a:tcPr/>
-                </a:tc>
-                <a:tc>
-                  <a:txBody>
-                    <a:bodyPr/>
-                    <a:lstStyle/>
-                    <a:p>
-                      <a:pPr>
-                        <a:defRPr sz="1500" b="0">
-                          <a:solidFill>
-                            <a:srgbClr val="1A1D24"/>
-                          </a:solidFill>
-                        </a:defRPr>
-                      </a:pPr>
-                      <a:r>
-                        <a:t>capture Greenline flags; seed the bet ledger</a:t>
-                      </a:r>
-                    </a:p>
-                  </a:txBody>
-                  <a:tcPr/>
-                </a:tc>
-              </a:tr>
-              <a:tr h="365760">
-                <a:tc>
-                  <a:txBody>
-                    <a:bodyPr/>
-                    <a:lstStyle/>
-                    <a:p>
-                      <a:pPr>
-                        <a:defRPr sz="1500" b="0">
-                          <a:solidFill>
-                            <a:srgbClr val="1A1D24"/>
-                          </a:solidFill>
-                        </a:defRPr>
-                      </a:pPr>
-                      <a:r>
-                        <a:t>Thursday–Saturday</a:t>
-                      </a:r>
-                    </a:p>
-                  </a:txBody>
-                  <a:tcPr/>
-                </a:tc>
-                <a:tc>
-                  <a:txBody>
-                    <a:bodyPr/>
-                    <a:lstStyle/>
-                    <a:p>
-                      <a:pPr>
-                        <a:defRPr sz="1500" b="0">
-                          <a:solidFill>
-                            <a:srgbClr val="1A1D24"/>
-                          </a:solidFill>
-                        </a:defRPr>
-                      </a:pPr>
-                      <a:r>
-                        <a:t>bet 6–12 unders at −110 or better; over-zero board at −120 or better</a:t>
-                      </a:r>
-                    </a:p>
-                  </a:txBody>
-                  <a:tcPr/>
-                </a:tc>
-              </a:tr>
-              <a:tr h="365760">
-                <a:tc>
-                  <a:txBody>
-                    <a:bodyPr/>
-                    <a:lstStyle/>
-                    <a:p>
-                      <a:pPr>
-                        <a:defRPr sz="1500" b="0">
-                          <a:solidFill>
-                            <a:srgbClr val="1A1D24"/>
-                          </a:solidFill>
-                        </a:defRPr>
-                      </a:pPr>
-                      <a:r>
-                        <a:t>Monday</a:t>
-                      </a:r>
-                    </a:p>
-                  </a:txBody>
-                  <a:tcPr/>
-                </a:tc>
-                <a:tc>
-                  <a:txBody>
-                    <a:bodyPr/>
-                    <a:lstStyle/>
-                    <a:p>
-                      <a:pPr>
-                        <a:defRPr sz="1500" b="0">
-                          <a:solidFill>
-                            <a:srgbClr val="1A1D24"/>
-                          </a:solidFill>
-                        </a:defRPr>
-                      </a:pPr>
-                      <a:r>
-                        <a:t>grade flags; mark which were bet; re-derive the unit (min of quarter Kelly and the 3% cap); re-size off the bankroll</a:t>
-                      </a:r>
-                    </a:p>
-                  </a:txBody>
-                  <a:tcPr/>
-                </a:tc>
-              </a:tr>
-            </a:tbl>
-          </a:graphicData>
-        </a:graphic>
-      </p:graphicFrame>
       <p:sp>
         <p:nvSpPr>
-          <p:cNvPr id="4" name="TextBox 3"/>
+          <p:cNvPr id="3" name="TextBox 2"/>
           <p:cNvSpPr txBox="1"/>
           <p:nvPr/>
         </p:nvSpPr>
         <p:spPr>
           <a:xfrm>
-            <a:off x="548640" y="3291840"/>
-            <a:ext cx="10972800" cy="2743200"/>
+            <a:off x="548640" y="1371600"/>
+            <a:ext cx="10972800" cy="5029200"/>
           </a:xfrm>
           <a:prstGeom prst="rect">
             <a:avLst/>
@@ -7516,7 +8322,7 @@
               </a:defRPr>
             </a:pPr>
             <a:r>
-              <a:t>The planning prior is fixed: 2026 flags plus the 2023–25 unders at half weight. The unit moves only by the Monday rule. Golf enters with a graded record, at the same rule.</a:t>
+              <a:t>• Greenline as independently validated. n=58 in 2026, interval 42.5–67.3%. The planning prior is half personal history of the same signal.</a:t>
             </a:r>
           </a:p>
           <a:p>
@@ -7531,7 +8337,67 @@
               </a:defRPr>
             </a:pPr>
             <a:r>
-              <a:t>Marking which flags get bet is the one manual step. It turns '6–12 a week' from a plan into evidence.</a:t>
+              <a:t>• The 2027 numbers as a forecast. They assume the edge persists unchanged on 2025's schedule.</a:t>
+            </a:r>
+          </a:p>
+          <a:p>
+            <a:pPr>
+              <a:spcAft>
+                <a:spcPts val="600"/>
+              </a:spcAft>
+              <a:defRPr sz="1500" b="0">
+                <a:solidFill>
+                  <a:srgbClr val="1A1D24"/>
+                </a:solidFill>
+              </a:defRPr>
+            </a:pPr>
+            <a:r>
+              <a:t>• Golf. No record, no price, no volume. A placeholder leg until graded.</a:t>
+            </a:r>
+          </a:p>
+          <a:p>
+            <a:pPr>
+              <a:spcAft>
+                <a:spcPts val="600"/>
+              </a:spcAft>
+              <a:defRPr sz="1500" b="0">
+                <a:solidFill>
+                  <a:srgbClr val="1A1D24"/>
+                </a:solidFill>
+              </a:defRPr>
+            </a:pPr>
+            <a:r>
+              <a:t>• A reproducible selection rule. 'Bet 6–12 of the week's flags' is a volume plan; no script picks which ones.</a:t>
+            </a:r>
+          </a:p>
+          <a:p>
+            <a:pPr>
+              <a:spcAft>
+                <a:spcPts val="600"/>
+              </a:spcAft>
+              <a:defRPr sz="1500" b="0">
+                <a:solidFill>
+                  <a:srgbClr val="1A1D24"/>
+                </a:solidFill>
+              </a:defRPr>
+            </a:pPr>
+            <a:r>
+              <a:t>• Kelly as today's rule. Quarter Kelly is 1.3%; the 3% drawdown cap binds at 1%. That is where the unit is headed if the record holds.</a:t>
+            </a:r>
+          </a:p>
+          <a:p>
+            <a:pPr>
+              <a:spcAft>
+                <a:spcPts val="600"/>
+              </a:spcAft>
+              <a:defRPr sz="1500" b="0">
+                <a:solidFill>
+                  <a:srgbClr val="1A1D24"/>
+                </a:solidFill>
+              </a:defRPr>
+            </a:pPr>
+            <a:r>
+              <a:t>• The negative cross-leg correlation as a hedge. A common model-or-market failure that hurts both legs is not modeled.</a:t>
             </a:r>
           </a:p>
         </p:txBody>

--- a/research/bankroll/docs/seed-bankroll-proposal-2026-09-21.pptx
+++ b/research/bankroll/docs/seed-bankroll-proposal-2026-09-21.pptx
@@ -15,6 +15,7 @@
     <p:sldId id="263" r:id="rId14"/>
     <p:sldId id="264" r:id="rId15"/>
     <p:sldId id="265" r:id="rId16"/>
+    <p:sldId id="266" r:id="rId17"/>
   </p:sldIdLst>
   <p:sldSz cx="12191695" cy="6858000" type="screen4x3"/>
   <p:notesSz cx="6858000" cy="9144000"/>
@@ -3292,6 +3293,175 @@
               </a:defRPr>
             </a:pPr>
             <a:r>
+              <a:t>What the numbers do not support</a:t>
+            </a:r>
+          </a:p>
+        </p:txBody>
+      </p:sp>
+      <p:sp>
+        <p:nvSpPr>
+          <p:cNvPr id="3" name="TextBox 2"/>
+          <p:cNvSpPr txBox="1"/>
+          <p:nvPr/>
+        </p:nvSpPr>
+        <p:spPr>
+          <a:xfrm>
+            <a:off x="548640" y="1371600"/>
+            <a:ext cx="10972800" cy="5029200"/>
+          </a:xfrm>
+          <a:prstGeom prst="rect">
+            <a:avLst/>
+          </a:prstGeom>
+          <a:noFill/>
+        </p:spPr>
+        <p:txBody>
+          <a:bodyPr wrap="square">
+            <a:spAutoFit/>
+          </a:bodyPr>
+          <a:lstStyle/>
+          <a:p>
+            <a:pPr>
+              <a:spcAft>
+                <a:spcPts val="600"/>
+              </a:spcAft>
+              <a:defRPr sz="1500" b="0">
+                <a:solidFill>
+                  <a:srgbClr val="1A1D24"/>
+                </a:solidFill>
+              </a:defRPr>
+            </a:pPr>
+            <a:r>
+              <a:t>• Greenline as independently validated. n=58 in 2026, interval 42.5–67.3%. The planning prior is half personal history of the same signal.</a:t>
+            </a:r>
+          </a:p>
+          <a:p>
+            <a:pPr>
+              <a:spcAft>
+                <a:spcPts val="600"/>
+              </a:spcAft>
+              <a:defRPr sz="1500" b="0">
+                <a:solidFill>
+                  <a:srgbClr val="1A1D24"/>
+                </a:solidFill>
+              </a:defRPr>
+            </a:pPr>
+            <a:r>
+              <a:t>• The 2027 numbers as a forecast. They assume the edge persists unchanged on 2025's schedule.</a:t>
+            </a:r>
+          </a:p>
+          <a:p>
+            <a:pPr>
+              <a:spcAft>
+                <a:spcPts val="600"/>
+              </a:spcAft>
+              <a:defRPr sz="1500" b="0">
+                <a:solidFill>
+                  <a:srgbClr val="1A1D24"/>
+                </a:solidFill>
+              </a:defRPr>
+            </a:pPr>
+            <a:r>
+              <a:t>• Golf. No record, no price, no volume. A placeholder leg until graded.</a:t>
+            </a:r>
+          </a:p>
+          <a:p>
+            <a:pPr>
+              <a:spcAft>
+                <a:spcPts val="600"/>
+              </a:spcAft>
+              <a:defRPr sz="1500" b="0">
+                <a:solidFill>
+                  <a:srgbClr val="1A1D24"/>
+                </a:solidFill>
+              </a:defRPr>
+            </a:pPr>
+            <a:r>
+              <a:t>• A reproducible selection rule. 'Bet 6–12 of the week's flags' is a volume plan; no script picks which ones.</a:t>
+            </a:r>
+          </a:p>
+          <a:p>
+            <a:pPr>
+              <a:spcAft>
+                <a:spcPts val="600"/>
+              </a:spcAft>
+              <a:defRPr sz="1500" b="0">
+                <a:solidFill>
+                  <a:srgbClr val="1A1D24"/>
+                </a:solidFill>
+              </a:defRPr>
+            </a:pPr>
+            <a:r>
+              <a:t>• Kelly as today's rule. Quarter Kelly is 1.3%; the 3% drawdown cap binds at 1%. That is where the unit is headed if the record holds.</a:t>
+            </a:r>
+          </a:p>
+          <a:p>
+            <a:pPr>
+              <a:spcAft>
+                <a:spcPts val="600"/>
+              </a:spcAft>
+              <a:defRPr sz="1500" b="0">
+                <a:solidFill>
+                  <a:srgbClr val="1A1D24"/>
+                </a:solidFill>
+              </a:defRPr>
+            </a:pPr>
+            <a:r>
+              <a:t>• The negative cross-leg correlation as a hedge. A common model-or-market failure that hurts both legs is not modeled.</a:t>
+            </a:r>
+          </a:p>
+        </p:txBody>
+      </p:sp>
+    </p:spTree>
+  </p:cSld>
+  <p:clrMapOvr>
+    <a:masterClrMapping/>
+  </p:clrMapOvr>
+</p:sld>
+</file>
+
+<file path=ppt/slides/slide11.xml><?xml version="1.0" encoding="utf-8"?>
+<p:sld xmlns:a="http://schemas.openxmlformats.org/drawingml/2006/main" xmlns:p="http://schemas.openxmlformats.org/presentationml/2006/main" xmlns:r="http://schemas.openxmlformats.org/officeDocument/2006/relationships">
+  <p:cSld>
+    <p:spTree>
+      <p:nvGrpSpPr>
+        <p:cNvPr id="1" name=""/>
+        <p:cNvGrpSpPr/>
+        <p:nvPr/>
+      </p:nvGrpSpPr>
+      <p:grpSpPr/>
+      <p:sp>
+        <p:nvSpPr>
+          <p:cNvPr id="2" name="TextBox 1"/>
+          <p:cNvSpPr txBox="1"/>
+          <p:nvPr/>
+        </p:nvSpPr>
+        <p:spPr>
+          <a:xfrm>
+            <a:off x="548640" y="320040"/>
+            <a:ext cx="10972800" cy="731520"/>
+          </a:xfrm>
+          <a:prstGeom prst="rect">
+            <a:avLst/>
+          </a:prstGeom>
+          <a:noFill/>
+        </p:spPr>
+        <p:txBody>
+          <a:bodyPr wrap="square">
+            <a:spAutoFit/>
+          </a:bodyPr>
+          <a:lstStyle/>
+          <a:p>
+            <a:pPr>
+              <a:spcAft>
+                <a:spcPts val="600"/>
+              </a:spcAft>
+              <a:defRPr sz="2800" b="1">
+                <a:solidFill>
+                  <a:srgbClr val="1A1D24"/>
+                </a:solidFill>
+              </a:defRPr>
+            </a:pPr>
+            <a:r>
               <a:t>What the money does each week</a:t>
             </a:r>
           </a:p>
@@ -8284,7 +8454,7 @@
               </a:defRPr>
             </a:pPr>
             <a:r>
-              <a:t>What the numbers do not support</a:t>
+              <a:t>A week, drawn</a:t>
             </a:r>
           </a:p>
         </p:txBody>
@@ -8297,8 +8467,8 @@
         </p:nvSpPr>
         <p:spPr>
           <a:xfrm>
-            <a:off x="548640" y="1371600"/>
-            <a:ext cx="10972800" cy="5029200"/>
+            <a:off x="548640" y="960120"/>
+            <a:ext cx="10972800" cy="457200"/>
           </a:xfrm>
           <a:prstGeom prst="rect">
             <a:avLst/>
@@ -8315,93 +8485,42 @@
               <a:spcAft>
                 <a:spcPts val="600"/>
               </a:spcAft>
-              <a:defRPr sz="1500" b="0">
+              <a:defRPr sz="1400" b="0">
                 <a:solidFill>
-                  <a:srgbClr val="1A1D24"/>
+                  <a:srgbClr val="6B7280"/>
                 </a:solidFill>
               </a:defRPr>
             </a:pPr>
             <a:r>
-              <a:t>• Greenline as independently validated. n=58 in 2026, interval 42.5–67.3%. The planning prior is half personal history of the same signal.</a:t>
-            </a:r>
-          </a:p>
-          <a:p>
-            <a:pPr>
-              <a:spcAft>
-                <a:spcPts val="600"/>
-              </a:spcAft>
-              <a:defRPr sz="1500" b="0">
-                <a:solidFill>
-                  <a:srgbClr val="1A1D24"/>
-                </a:solidFill>
-              </a:defRPr>
-            </a:pPr>
-            <a:r>
-              <a:t>• The 2027 numbers as a forecast. They assume the edge persists unchanged on 2025's schedule.</a:t>
-            </a:r>
-          </a:p>
-          <a:p>
-            <a:pPr>
-              <a:spcAft>
-                <a:spcPts val="600"/>
-              </a:spcAft>
-              <a:defRPr sz="1500" b="0">
-                <a:solidFill>
-                  <a:srgbClr val="1A1D24"/>
-                </a:solidFill>
-              </a:defRPr>
-            </a:pPr>
-            <a:r>
-              <a:t>• Golf. No record, no price, no volume. A placeholder leg until graded.</a:t>
-            </a:r>
-          </a:p>
-          <a:p>
-            <a:pPr>
-              <a:spcAft>
-                <a:spcPts val="600"/>
-              </a:spcAft>
-              <a:defRPr sz="1500" b="0">
-                <a:solidFill>
-                  <a:srgbClr val="1A1D24"/>
-                </a:solidFill>
-              </a:defRPr>
-            </a:pPr>
-            <a:r>
-              <a:t>• A reproducible selection rule. 'Bet 6–12 of the week's flags' is a volume plan; no script picks which ones.</a:t>
-            </a:r>
-          </a:p>
-          <a:p>
-            <a:pPr>
-              <a:spcAft>
-                <a:spcPts val="600"/>
-              </a:spcAft>
-              <a:defRPr sz="1500" b="0">
-                <a:solidFill>
-                  <a:srgbClr val="1A1D24"/>
-                </a:solidFill>
-              </a:defRPr>
-            </a:pPr>
-            <a:r>
-              <a:t>• Kelly as today's rule. Quarter Kelly is 1.3%; the 3% drawdown cap binds at 1%. That is where the unit is headed if the record holds.</a:t>
-            </a:r>
-          </a:p>
-          <a:p>
-            <a:pPr>
-              <a:spcAft>
-                <a:spcPts val="600"/>
-              </a:spcAft>
-              <a:defRPr sz="1500" b="0">
-                <a:solidFill>
-                  <a:srgbClr val="1A1D24"/>
-                </a:solidFill>
-              </a:defRPr>
-            </a:pPr>
-            <a:r>
-              <a:t>• The negative cross-leg correlation as a hedge. A common model-or-market failure that hurts both legs is not modeled.</a:t>
-            </a:r>
-          </a:p>
-        </p:txBody>
-      </p:sp>
+              <a:t>Left: the simulated season whose ending bankroll is closest to the median of all 50,000. Right: the spread of a single week at both units.</a:t>
+            </a:r>
+          </a:p>
+        </p:txBody>
+      </p:sp>
+      <p:pic>
+        <p:nvPicPr>
+          <p:cNvPr id="4" name="Picture 3" descr="weekly-pnl-2026-09-21.png"/>
+          <p:cNvPicPr>
+            <a:picLocks noChangeAspect="1"/>
+          </p:cNvPicPr>
+          <p:nvPr/>
+        </p:nvPicPr>
+        <p:blipFill>
+          <a:blip r:embed="rId2"/>
+          <a:stretch>
+            <a:fillRect/>
+          </a:stretch>
+        </p:blipFill>
+        <p:spPr>
+          <a:xfrm>
+            <a:off x="411480" y="1828800"/>
+            <a:ext cx="11384280" cy="4150851"/>
+          </a:xfrm>
+          <a:prstGeom prst="rect">
+            <a:avLst/>
+          </a:prstGeom>
+        </p:spPr>
+      </p:pic>
     </p:spTree>
   </p:cSld>
   <p:clrMapOvr>
